--- a/VTU-QFF-NEXORA-HEATSHIELD-Q.pptx
+++ b/VTU-QFF-NEXORA-HEATSHIELD-Q.pptx
@@ -3434,7 +3434,7 @@
         </p:nvSpPr>
         <p:spPr>
           <a:xfrm>
-            <a:off x="457200" y="1234440"/>
+            <a:off x="1691640" y="2715260"/>
             <a:ext cx="3383280" cy="1645920"/>
           </a:xfrm>
           <a:prstGeom prst="rect">
@@ -4179,6 +4179,78 @@
               <a:t>India</a:t>
             </a:r>
             <a:endParaRPr lang="en-US" sz="900" dirty="0"/>
+          </a:p>
+        </p:txBody>
+      </p:sp>
+      <p:sp>
+        <p:nvSpPr>
+          <p:cNvPr id="18" name="Text 1"/>
+          <p:cNvSpPr txBox="1"/>
+          <p:nvPr/>
+        </p:nvSpPr>
+        <p:spPr>
+          <a:xfrm>
+            <a:off x="4427855" y="5087620"/>
+            <a:ext cx="3383280" cy="1645920"/>
+          </a:xfrm>
+          <a:prstGeom prst="rect">
+            <a:avLst/>
+          </a:prstGeom>
+          <a:noFill/>
+        </p:spPr>
+        <p:txBody>
+          <a:bodyPr wrap="square" lIns="0" tIns="0" rIns="0" bIns="0" rtlCol="0" anchor="t"/>
+          <a:lstStyle/>
+          <a:p>
+            <a:pPr marL="0" indent="0">
+              <a:buNone/>
+            </a:pPr>
+            <a:r>
+              <a:rPr lang="en-US" sz="3800" b="1" dirty="0">
+                <a:solidFill>
+                  <a:srgbClr val="2E1B5B"/>
+                </a:solidFill>
+                <a:latin typeface="Georgia" panose="02040502050405020303" pitchFamily="34" charset="0"/>
+                <a:ea typeface="Georgia" panose="02040502050405020303" pitchFamily="34" charset="-122"/>
+                <a:cs typeface="Georgia" panose="02040502050405020303" pitchFamily="34" charset="-120"/>
+              </a:rPr>
+              <a:t>Qiskit</a:t>
+            </a:r>
+            <a:endParaRPr lang="en-US" sz="3800" dirty="0"/>
+          </a:p>
+          <a:p>
+            <a:pPr marL="0" indent="0">
+              <a:buNone/>
+            </a:pPr>
+            <a:r>
+              <a:rPr lang="en-US" sz="3800" b="1" dirty="0">
+                <a:solidFill>
+                  <a:srgbClr val="E8639F"/>
+                </a:solidFill>
+                <a:latin typeface="Georgia" panose="02040502050405020303" pitchFamily="34" charset="0"/>
+                <a:ea typeface="Georgia" panose="02040502050405020303" pitchFamily="34" charset="-122"/>
+                <a:cs typeface="Georgia" panose="02040502050405020303" pitchFamily="34" charset="-120"/>
+              </a:rPr>
+              <a:t>Fall Fest</a:t>
+            </a:r>
+            <a:endParaRPr lang="en-US" sz="3800" dirty="0"/>
+          </a:p>
+          <a:p>
+            <a:pPr marL="0" indent="0">
+              <a:buNone/>
+            </a:pPr>
+            <a:r>
+              <a:rPr lang="en-US" sz="3800" b="1" dirty="0">
+                <a:solidFill>
+                  <a:srgbClr val="2E1B5B"/>
+                </a:solidFill>
+                <a:latin typeface="Georgia" panose="02040502050405020303" pitchFamily="34" charset="0"/>
+                <a:ea typeface="Georgia" panose="02040502050405020303" pitchFamily="34" charset="-122"/>
+                <a:cs typeface="Georgia" panose="02040502050405020303" pitchFamily="34" charset="-120"/>
+              </a:rPr>
+              <a:t>2026</a:t>
+            </a:r>
+            <a:endParaRPr lang="en-US" sz="3800" dirty="0"/>
           </a:p>
         </p:txBody>
       </p:sp>
@@ -4445,17 +4517,10 @@
               <a:buNone/>
             </a:pPr>
             <a:r>
-              <a:rPr lang="en-US" sz="1100" i="0" dirty="0">
-                <a:solidFill>
-                  <a:srgbClr val="2E1B5B"/>
-                </a:solidFill>
-                <a:latin typeface="Calibri" panose="020F0502020204030204" pitchFamily="34" charset="0"/>
-                <a:ea typeface="Calibri" panose="020F0502020204030204" pitchFamily="34" charset="-122"/>
-                <a:cs typeface="Calibri" panose="020F0502020204030204" pitchFamily="34" charset="-120"/>
-              </a:rPr>
-              <a:t>Add YouTube link</a:t>
-            </a:r>
-            <a:endParaRPr lang="en-US" sz="900" dirty="0"/>
+              <a:rPr lang="en-US" altLang="en-US" sz="900" dirty="0"/>
+              <a:t>https://youtu.be/7Qv1oBpaJqU</a:t>
+            </a:r>
+            <a:endParaRPr lang="en-US" altLang="en-US" sz="900" dirty="0"/>
           </a:p>
         </p:txBody>
       </p:sp>
